--- a/Accent_Blinds_Company_Profile_English_Elegant_Cover.pptx
+++ b/Accent_Blinds_Company_Profile_English_Elegant_Cover.pptx
@@ -324,7 +324,7 @@
           <a:p>
             <a:fld id="{5BCAD085-E8A6-8845-BD4E-CB4CCA059FC4}" type="datetimeFigureOut">
               <a:rPr lang="en-US" smtClean="0"/>
-              <a:t>10/20/2026</a:t>
+              <a:t>10/23/2026</a:t>
             </a:fld>
             <a:endParaRPr lang="en-US"/>
           </a:p>
@@ -492,7 +492,7 @@
           <a:p>
             <a:fld id="{5BCAD085-E8A6-8845-BD4E-CB4CCA059FC4}" type="datetimeFigureOut">
               <a:rPr lang="en-US" smtClean="0"/>
-              <a:t>10/20/2026</a:t>
+              <a:t>10/23/2026</a:t>
             </a:fld>
             <a:endParaRPr lang="en-US"/>
           </a:p>
@@ -670,7 +670,7 @@
           <a:p>
             <a:fld id="{5BCAD085-E8A6-8845-BD4E-CB4CCA059FC4}" type="datetimeFigureOut">
               <a:rPr lang="en-US" smtClean="0"/>
-              <a:t>10/20/2026</a:t>
+              <a:t>10/23/2026</a:t>
             </a:fld>
             <a:endParaRPr lang="en-US"/>
           </a:p>
@@ -838,7 +838,7 @@
           <a:p>
             <a:fld id="{5BCAD085-E8A6-8845-BD4E-CB4CCA059FC4}" type="datetimeFigureOut">
               <a:rPr lang="en-US" smtClean="0"/>
-              <a:t>10/20/2026</a:t>
+              <a:t>10/23/2026</a:t>
             </a:fld>
             <a:endParaRPr lang="en-US"/>
           </a:p>
@@ -1083,7 +1083,7 @@
           <a:p>
             <a:fld id="{5BCAD085-E8A6-8845-BD4E-CB4CCA059FC4}" type="datetimeFigureOut">
               <a:rPr lang="en-US" smtClean="0"/>
-              <a:t>10/20/2026</a:t>
+              <a:t>10/23/2026</a:t>
             </a:fld>
             <a:endParaRPr lang="en-US"/>
           </a:p>
@@ -1368,7 +1368,7 @@
           <a:p>
             <a:fld id="{5BCAD085-E8A6-8845-BD4E-CB4CCA059FC4}" type="datetimeFigureOut">
               <a:rPr lang="en-US" smtClean="0"/>
-              <a:t>10/20/2026</a:t>
+              <a:t>10/23/2026</a:t>
             </a:fld>
             <a:endParaRPr lang="en-US"/>
           </a:p>
@@ -1787,7 +1787,7 @@
           <a:p>
             <a:fld id="{5BCAD085-E8A6-8845-BD4E-CB4CCA059FC4}" type="datetimeFigureOut">
               <a:rPr lang="en-US" smtClean="0"/>
-              <a:t>10/20/2026</a:t>
+              <a:t>10/23/2026</a:t>
             </a:fld>
             <a:endParaRPr lang="en-US"/>
           </a:p>
@@ -1904,7 +1904,7 @@
           <a:p>
             <a:fld id="{5BCAD085-E8A6-8845-BD4E-CB4CCA059FC4}" type="datetimeFigureOut">
               <a:rPr lang="en-US" smtClean="0"/>
-              <a:t>10/20/2026</a:t>
+              <a:t>10/23/2026</a:t>
             </a:fld>
             <a:endParaRPr lang="en-US"/>
           </a:p>
@@ -1999,7 +1999,7 @@
           <a:p>
             <a:fld id="{5BCAD085-E8A6-8845-BD4E-CB4CCA059FC4}" type="datetimeFigureOut">
               <a:rPr lang="en-US" smtClean="0"/>
-              <a:t>10/20/2026</a:t>
+              <a:t>10/23/2026</a:t>
             </a:fld>
             <a:endParaRPr lang="en-US"/>
           </a:p>
@@ -2274,7 +2274,7 @@
           <a:p>
             <a:fld id="{5BCAD085-E8A6-8845-BD4E-CB4CCA059FC4}" type="datetimeFigureOut">
               <a:rPr lang="en-US" smtClean="0"/>
-              <a:t>10/20/2026</a:t>
+              <a:t>10/23/2026</a:t>
             </a:fld>
             <a:endParaRPr lang="en-US"/>
           </a:p>
@@ -2526,7 +2526,7 @@
           <a:p>
             <a:fld id="{5BCAD085-E8A6-8845-BD4E-CB4CCA059FC4}" type="datetimeFigureOut">
               <a:rPr lang="en-US" smtClean="0"/>
-              <a:t>10/20/2026</a:t>
+              <a:t>10/23/2026</a:t>
             </a:fld>
             <a:endParaRPr lang="en-US"/>
           </a:p>
@@ -2737,7 +2737,7 @@
           <a:p>
             <a:fld id="{5BCAD085-E8A6-8845-BD4E-CB4CCA059FC4}" type="datetimeFigureOut">
               <a:rPr lang="en-US" smtClean="0"/>
-              <a:t>10/20/2026</a:t>
+              <a:t>10/23/2026</a:t>
             </a:fld>
             <a:endParaRPr lang="en-US"/>
           </a:p>
@@ -3122,7 +3122,7 @@
       </p:grpSpPr>
       <p:pic>
         <p:nvPicPr>
-          <p:cNvPr id="2" name="Picture 1" descr="accent_product_visual_1_crop.jpg"/>
+          <p:cNvPr id="12" name="Picture 11" descr="logo-accent.png"/>
           <p:cNvPicPr>
             <a:picLocks noChangeAspect="1"/>
           </p:cNvPicPr>
@@ -3136,31 +3136,7 @@
         </p:blipFill>
         <p:spPr>
           <a:xfrm>
-            <a:off x="4709160" y="658368"/>
-            <a:ext cx="2788920" cy="1255014"/>
-          </a:xfrm>
-          <a:prstGeom prst="rect">
-            <a:avLst/>
-          </a:prstGeom>
-        </p:spPr>
-      </p:pic>
-      <p:pic>
-        <p:nvPicPr>
-          <p:cNvPr id="12" name="Picture 11" descr="logo-accent.png"/>
-          <p:cNvPicPr>
-            <a:picLocks noChangeAspect="1"/>
-          </p:cNvPicPr>
-          <p:nvPr/>
-        </p:nvPicPr>
-        <p:blipFill>
-          <a:blip r:embed="rId3"/>
-          <a:stretch>
-            <a:fillRect/>
-          </a:stretch>
-        </p:blipFill>
-        <p:spPr>
-          <a:xfrm>
-            <a:off x="6876627" y="593161"/>
+            <a:off x="4701387" y="593161"/>
             <a:ext cx="2788920" cy="1255014"/>
           </a:xfrm>
           <a:prstGeom prst="rect">
@@ -4002,7 +3978,7 @@
           <a:lstStyle/>
           <a:p>
             <a:r>
-              <a:rPr>
+              <a:rPr dirty="0">
                 <a:solidFill/>
               </a:rPr>
               <a:t>Adjust the amount of natural daylight.</a:t>
@@ -4243,7 +4219,7 @@
         <p:spPr>
           <a:xfrm>
             <a:off x="685800" y="3794760"/>
-            <a:ext cx="3429000" cy="1325880"/>
+            <a:ext cx="3429000" cy="1673352"/>
           </a:xfrm>
           <a:prstGeom prst="roundRect">
             <a:avLst>
@@ -4338,10 +4314,22 @@
           <a:lstStyle/>
           <a:p>
             <a:r>
-              <a:rPr>
+              <a:rPr dirty="0">
                 <a:solidFill/>
               </a:rPr>
-              <a:t>Complete the space with colour, texture, and form.</a:t>
+              <a:t>Complete the space with </a:t>
+            </a:r>
+            <a:r>
+              <a:rPr dirty="0" err="1">
+                <a:solidFill/>
+              </a:rPr>
+              <a:t>colour</a:t>
+            </a:r>
+            <a:r>
+              <a:rPr dirty="0">
+                <a:solidFill/>
+              </a:rPr>
+              <a:t>, texture, and form.</a:t>
             </a:r>
           </a:p>
         </p:txBody>
@@ -4355,7 +4343,7 @@
         <p:spPr>
           <a:xfrm>
             <a:off x="4507992" y="3794760"/>
-            <a:ext cx="3429000" cy="1325880"/>
+            <a:ext cx="3429000" cy="1673352"/>
           </a:xfrm>
           <a:prstGeom prst="roundRect">
             <a:avLst>
@@ -4450,10 +4438,22 @@
           <a:lstStyle/>
           <a:p>
             <a:r>
-              <a:rPr>
+              <a:rPr dirty="0">
                 <a:solidFill/>
               </a:rPr>
-              <a:t>Choose manual operation or motorisation on selected products.</a:t>
+              <a:t>Choose manual operation or </a:t>
+            </a:r>
+            <a:r>
+              <a:rPr dirty="0" err="1">
+                <a:solidFill/>
+              </a:rPr>
+              <a:t>motorisation</a:t>
+            </a:r>
+            <a:r>
+              <a:rPr dirty="0">
+                <a:solidFill/>
+              </a:rPr>
+              <a:t> on selected products.</a:t>
             </a:r>
           </a:p>
         </p:txBody>
@@ -4467,7 +4467,7 @@
         <p:spPr>
           <a:xfrm>
             <a:off x="8330183" y="3794760"/>
-            <a:ext cx="3429000" cy="1325880"/>
+            <a:ext cx="3429000" cy="1673352"/>
           </a:xfrm>
           <a:prstGeom prst="roundRect">
             <a:avLst>
@@ -5570,8 +5570,8 @@
         </p:nvSpPr>
         <p:spPr>
           <a:xfrm>
-            <a:off x="685800" y="2468880"/>
-            <a:ext cx="2514600" cy="2468880"/>
+            <a:off x="685800" y="2468879"/>
+            <a:ext cx="2514600" cy="2834637"/>
           </a:xfrm>
           <a:prstGeom prst="roundRect">
             <a:avLst>
@@ -5798,8 +5798,8 @@
         </p:nvSpPr>
         <p:spPr>
           <a:xfrm>
-            <a:off x="3593592" y="2468880"/>
-            <a:ext cx="2514600" cy="2468880"/>
+            <a:off x="3593592" y="2468879"/>
+            <a:ext cx="2514600" cy="2834637"/>
           </a:xfrm>
           <a:prstGeom prst="roundRect">
             <a:avLst>
@@ -6026,8 +6026,8 @@
         </p:nvSpPr>
         <p:spPr>
           <a:xfrm>
-            <a:off x="6501384" y="2468880"/>
-            <a:ext cx="2514600" cy="2468880"/>
+            <a:off x="6501384" y="2468879"/>
+            <a:ext cx="2514600" cy="2834637"/>
           </a:xfrm>
           <a:prstGeom prst="roundRect">
             <a:avLst>
@@ -6254,8 +6254,8 @@
         </p:nvSpPr>
         <p:spPr>
           <a:xfrm>
-            <a:off x="9409176" y="2468880"/>
-            <a:ext cx="2514600" cy="2468880"/>
+            <a:off x="9409176" y="2468879"/>
+            <a:ext cx="2514600" cy="2834637"/>
           </a:xfrm>
           <a:prstGeom prst="roundRect">
             <a:avLst>
@@ -17213,7 +17213,7 @@
         </p:nvSpPr>
         <p:spPr>
           <a:xfrm>
-            <a:off x="658368" y="1389888"/>
+            <a:off x="658368" y="1243131"/>
             <a:ext cx="10789920" cy="457200"/>
           </a:xfrm>
           <a:prstGeom prst="rect">
@@ -17228,7 +17228,7 @@
           <a:lstStyle/>
           <a:p>
             <a:r>
-              <a:rPr>
+              <a:rPr dirty="0">
                 <a:solidFill/>
               </a:rPr>
               <a:t>Distinctive features paired with thoughtful design.</a:t>
@@ -17252,7 +17252,7 @@
         </p:blipFill>
         <p:spPr>
           <a:xfrm>
-            <a:off x="685800" y="2103120"/>
+            <a:off x="685800" y="1843473"/>
             <a:ext cx="5212080" cy="3429000"/>
           </a:xfrm>
           <a:prstGeom prst="rect">
@@ -17276,7 +17276,7 @@
         </p:blipFill>
         <p:spPr>
           <a:xfrm>
-            <a:off x="6263640" y="2103120"/>
+            <a:off x="6263640" y="1843473"/>
             <a:ext cx="5212080" cy="3429000"/>
           </a:xfrm>
           <a:prstGeom prst="rect">
@@ -17292,7 +17292,7 @@
         </p:nvSpPr>
         <p:spPr>
           <a:xfrm>
-            <a:off x="822960" y="5650992"/>
+            <a:off x="822960" y="5492946"/>
             <a:ext cx="4892040" cy="292608"/>
           </a:xfrm>
           <a:prstGeom prst="rect">
@@ -17308,78 +17308,78 @@
           <a:p>
             <a:pPr algn="l"/>
             <a:r>
+              <a:rPr sz="1600" b="1" dirty="0">
+                <a:solidFill>
+                  <a:srgbClr val="437D77"/>
+                </a:solidFill>
+                <a:latin typeface="Aptos"/>
+              </a:rPr>
+              <a:t>CELLULAR SHADES</a:t>
+            </a:r>
+          </a:p>
+        </p:txBody>
+      </p:sp>
+      <p:sp>
+        <p:nvSpPr>
+          <p:cNvPr id="8" name="TextBox 7"/>
+          <p:cNvSpPr txBox="1"/>
+          <p:nvPr/>
+        </p:nvSpPr>
+        <p:spPr>
+          <a:xfrm>
+            <a:off x="822960" y="5815131"/>
+            <a:ext cx="4892040" cy="274320"/>
+          </a:xfrm>
+          <a:prstGeom prst="rect">
+            <a:avLst/>
+          </a:prstGeom>
+          <a:noFill/>
+        </p:spPr>
+        <p:txBody>
+          <a:bodyPr wrap="square" lIns="27432" tIns="18288" rIns="27432" bIns="18288" anchor="t">
+            <a:spAutoFit/>
+          </a:bodyPr>
+          <a:lstStyle/>
+          <a:p>
+            <a:r>
+              <a:rPr dirty="0">
+                <a:solidFill/>
+              </a:rPr>
+              <a:t>Honeycomb cells help with insulation and light control.</a:t>
+            </a:r>
+          </a:p>
+        </p:txBody>
+      </p:sp>
+      <p:sp>
+        <p:nvSpPr>
+          <p:cNvPr id="9" name="TextBox 8"/>
+          <p:cNvSpPr txBox="1"/>
+          <p:nvPr/>
+        </p:nvSpPr>
+        <p:spPr>
+          <a:xfrm>
+            <a:off x="6400800" y="5492946"/>
+            <a:ext cx="4892040" cy="292608"/>
+          </a:xfrm>
+          <a:prstGeom prst="rect">
+            <a:avLst/>
+          </a:prstGeom>
+          <a:noFill/>
+        </p:spPr>
+        <p:txBody>
+          <a:bodyPr wrap="square" lIns="27432" tIns="18288" rIns="27432" bIns="18288" anchor="t">
+            <a:spAutoFit/>
+          </a:bodyPr>
+          <a:lstStyle/>
+          <a:p>
+            <a:pPr algn="l"/>
+            <a:r>
               <a:rPr sz="1600" b="1">
                 <a:solidFill>
                   <a:srgbClr val="437D77"/>
                 </a:solidFill>
                 <a:latin typeface="Aptos"/>
               </a:rPr>
-              <a:t>CELLULAR SHADES</a:t>
-            </a:r>
-          </a:p>
-        </p:txBody>
-      </p:sp>
-      <p:sp>
-        <p:nvSpPr>
-          <p:cNvPr id="8" name="TextBox 7"/>
-          <p:cNvSpPr txBox="1"/>
-          <p:nvPr/>
-        </p:nvSpPr>
-        <p:spPr>
-          <a:xfrm>
-            <a:off x="822960" y="5961888"/>
-            <a:ext cx="4892040" cy="274320"/>
-          </a:xfrm>
-          <a:prstGeom prst="rect">
-            <a:avLst/>
-          </a:prstGeom>
-          <a:noFill/>
-        </p:spPr>
-        <p:txBody>
-          <a:bodyPr wrap="square" lIns="27432" tIns="18288" rIns="27432" bIns="18288" anchor="t">
-            <a:spAutoFit/>
-          </a:bodyPr>
-          <a:lstStyle/>
-          <a:p>
-            <a:r>
-              <a:rPr>
-                <a:solidFill/>
-              </a:rPr>
-              <a:t>Honeycomb cells help with insulation and light control.</a:t>
-            </a:r>
-          </a:p>
-        </p:txBody>
-      </p:sp>
-      <p:sp>
-        <p:nvSpPr>
-          <p:cNvPr id="9" name="TextBox 8"/>
-          <p:cNvSpPr txBox="1"/>
-          <p:nvPr/>
-        </p:nvSpPr>
-        <p:spPr>
-          <a:xfrm>
-            <a:off x="6400800" y="5650992"/>
-            <a:ext cx="4892040" cy="292608"/>
-          </a:xfrm>
-          <a:prstGeom prst="rect">
-            <a:avLst/>
-          </a:prstGeom>
-          <a:noFill/>
-        </p:spPr>
-        <p:txBody>
-          <a:bodyPr wrap="square" lIns="27432" tIns="18288" rIns="27432" bIns="18288" anchor="t">
-            <a:spAutoFit/>
-          </a:bodyPr>
-          <a:lstStyle/>
-          <a:p>
-            <a:pPr algn="l"/>
-            <a:r>
-              <a:rPr sz="1600" b="1">
-                <a:solidFill>
-                  <a:srgbClr val="437D77"/>
-                </a:solidFill>
-                <a:latin typeface="Aptos"/>
-              </a:rPr>
               <a:t>PVC SHUTTER</a:t>
             </a:r>
           </a:p>
@@ -17393,7 +17393,7 @@
         </p:nvSpPr>
         <p:spPr>
           <a:xfrm>
-            <a:off x="6400800" y="5961888"/>
+            <a:off x="6400800" y="5815131"/>
             <a:ext cx="4892040" cy="274320"/>
           </a:xfrm>
           <a:prstGeom prst="rect">
